--- a/Report/2142851 김형준 딥러닝 리포트.pptx
+++ b/Report/2142851 김형준 딥러닝 리포트.pptx
@@ -3335,7 +3335,7 @@
         </p:nvGrpSpPr>
         <p:grpSpPr>
           <a:xfrm>
-            <a:off x="3681413" y="1574800"/>
+            <a:off x="764041" y="362858"/>
             <a:ext cx="2867025" cy="2128839"/>
             <a:chOff x="3681413" y="1574800"/>
             <a:chExt cx="2867025" cy="2128839"/>
